--- a/assets/pptx/catalog-658.pptx
+++ b/assets/pptx/catalog-658.pptx
@@ -3304,7 +3304,7 @@
                 <a:ea typeface="Ebrima"/>
                 <a:cs typeface="Ebrima"/>
               </a:rPr>
-              <a:t>ኢየሱስ ጌታ ነው (4x)</a:t>
+              <a:t>ኢየሱስ ጌታ ነው 4x</a:t>
             </a:r>
           </a:p>
         </p:txBody>
@@ -3546,7 +3546,7 @@
                 <a:ea typeface="Ebrima"/>
                 <a:cs typeface="Ebrima"/>
               </a:rPr>
-              <a:t>ኢየሱስ ጌታ ነው (2x)</a:t>
+              <a:t>ኢየሱስ ጌታ ነው 2x</a:t>
             </a:r>
           </a:p>
         </p:txBody>
@@ -3613,7 +3613,7 @@
                 <a:ea typeface="Ebrima"/>
                 <a:cs typeface="Ebrima"/>
               </a:rPr>
-              <a:t>ማኅተሙን የፈታ (ጌታ)</a:t>
+              <a:t>ማኅተሙን የፈታ ጌታ</a:t>
             </a:r>
           </a:p>
           <a:p>
@@ -3631,7 +3631,7 @@
                 <a:ea typeface="Ebrima"/>
                 <a:cs typeface="Ebrima"/>
               </a:rPr>
-              <a:t>በሞት ያልተረታ (ጌታ)</a:t>
+              <a:t>በሞት ያልተረታ ጌታ</a:t>
             </a:r>
           </a:p>
           <a:p>
@@ -3649,7 +3649,7 @@
                 <a:ea typeface="Ebrima"/>
                 <a:cs typeface="Ebrima"/>
               </a:rPr>
-              <a:t>በሰማይ በምድር እርሱ ብቻ አለቃ (ጌታ) (2x)</a:t>
+              <a:t>በሰማይ በምድር እርሱ ብቻ አለቃ ጌታ 2x</a:t>
             </a:r>
           </a:p>
         </p:txBody>
@@ -3770,7 +3770,7 @@
                 <a:ea typeface="Ebrima"/>
                 <a:cs typeface="Ebrima"/>
               </a:rPr>
-              <a:t>ኢየሱስ ጌታ ነው (2x)</a:t>
+              <a:t>ኢየሱስ ጌታ ነው 2x</a:t>
             </a:r>
           </a:p>
         </p:txBody>
@@ -3837,7 +3837,7 @@
                 <a:ea typeface="Ebrima"/>
                 <a:cs typeface="Ebrima"/>
               </a:rPr>
-              <a:t>ፍጥረት ሊሰግዱለት (ጌታ)</a:t>
+              <a:t>ፍጥረት ሊሰግዱለት ጌታ</a:t>
             </a:r>
           </a:p>
           <a:p>
@@ -3855,7 +3855,7 @@
                 <a:ea typeface="Ebrima"/>
                 <a:cs typeface="Ebrima"/>
               </a:rPr>
-              <a:t>የወጉትም ሊያዩት (ጌታ)</a:t>
+              <a:t>የወጉትም ሊያዩት ጌታ</a:t>
             </a:r>
           </a:p>
           <a:p>
@@ -3873,7 +3873,7 @@
                 <a:ea typeface="Ebrima"/>
                 <a:cs typeface="Ebrima"/>
               </a:rPr>
-              <a:t>በክብሩ ይመጣል ደምቆ ከከዋክብት (ጌታ) (2x)</a:t>
+              <a:t>በክብሩ ይመጣል ደምቆ ከከዋክብት ጌታ 2x</a:t>
             </a:r>
           </a:p>
         </p:txBody>
@@ -3994,7 +3994,7 @@
                 <a:ea typeface="Ebrima"/>
                 <a:cs typeface="Ebrima"/>
               </a:rPr>
-              <a:t>ኢየሱስ ጌታ ነው (2x)</a:t>
+              <a:t>ኢየሱስ ጌታ ነው 2x</a:t>
             </a:r>
           </a:p>
         </p:txBody>
@@ -4061,7 +4061,7 @@
                 <a:ea typeface="Ebrima"/>
                 <a:cs typeface="Ebrima"/>
               </a:rPr>
-              <a:t>መንግሥቱን ሊያሰፋ (ጌታ)</a:t>
+              <a:t>መንግሥቱን ሊያሰፋ ጌታ</a:t>
             </a:r>
           </a:p>
           <a:p>
@@ -4079,7 +4079,7 @@
                 <a:ea typeface="Ebrima"/>
                 <a:cs typeface="Ebrima"/>
               </a:rPr>
-              <a:t>ዙፋኑን ሊያጸና (ጌታ)</a:t>
+              <a:t>ዙፋኑን ሊያጸና ጌታ</a:t>
             </a:r>
           </a:p>
           <a:p>
@@ -4097,7 +4097,7 @@
                 <a:ea typeface="Ebrima"/>
                 <a:cs typeface="Ebrima"/>
               </a:rPr>
-              <a:t>በአጀብ ይመለሳል ከመላእክቱ ጋራ (ጌታ) (2x)</a:t>
+              <a:t>በአጀብ ይመለሳል ከመላእክቱ ጋራ ጌታ 2x</a:t>
             </a:r>
           </a:p>
         </p:txBody>
@@ -4218,7 +4218,7 @@
                 <a:ea typeface="Ebrima"/>
                 <a:cs typeface="Ebrima"/>
               </a:rPr>
-              <a:t>ኢየሱስ ጌታ ነው (2x)</a:t>
+              <a:t>ኢየሱስ ጌታ ነው 2x</a:t>
             </a:r>
           </a:p>
         </p:txBody>
@@ -4285,7 +4285,7 @@
                 <a:ea typeface="Ebrima"/>
                 <a:cs typeface="Ebrima"/>
               </a:rPr>
-              <a:t>አሜን ማራናታ (ጌታ)</a:t>
+              <a:t>አሜን ማራናታ ጌታ</a:t>
             </a:r>
           </a:p>
           <a:p>
@@ -4303,7 +4303,7 @@
                 <a:ea typeface="Ebrima"/>
                 <a:cs typeface="Ebrima"/>
               </a:rPr>
-              <a:t>አሁን ማራናታ (ጌታ)</a:t>
+              <a:t>አሁን ማራናታ ጌታ</a:t>
             </a:r>
           </a:p>
           <a:p>
@@ -4321,7 +4321,7 @@
                 <a:ea typeface="Ebrima"/>
                 <a:cs typeface="Ebrima"/>
               </a:rPr>
-              <a:t>የንጋቱ ኮከብ የፍጥረት አለኝታ (ጌታ) (2x)</a:t>
+              <a:t>የንጋቱ ኮከብ የፍጥረት አለኝታ ጌታ 2x</a:t>
             </a:r>
           </a:p>
         </p:txBody>
